--- a/05-AI应用基础48课时版/V2授课PPT/W19-第22次课-多智能体检修调度（下）：.pptx
+++ b/05-AI应用基础48课时版/V2授课PPT/W19-第22次课-多智能体检修调度（下）：.pptx
@@ -12,6 +12,8 @@
     <p:sldId id="319" r:id="rId71"/>
     <p:sldId id="367" r:id="rId16"/>
     <p:sldId id="368" r:id="rId17"/>
+    <p:sldId id="369" r:id="rId18"/>
+    <p:sldId id="370" r:id="rId19"/>
     <p:sldId id="366" r:id="rId15"/>
     <p:sldId id="364" r:id="rId116"/>
     <p:sldId id="365" r:id="rId117"/>
@@ -4670,6 +4672,2142 @@
 </p:sld>
 </file>
 
+<file path=ppt/slides/slide11.xml><?xml version="1.0" encoding="utf-8"?>
+<p:sld xmlns:a="http://schemas.openxmlformats.org/drawingml/2006/main" xmlns:p="http://schemas.openxmlformats.org/presentationml/2006/main" xmlns:r="http://schemas.openxmlformats.org/officeDocument/2006/relationships">
+  <p:cSld>
+    <p:spTree>
+      <p:nvGrpSpPr>
+        <p:cNvPr id="1" name=""/>
+        <p:cNvGrpSpPr/>
+        <p:nvPr/>
+      </p:nvGrpSpPr>
+      <p:grpSpPr/>
+      <p:sp>
+        <p:nvSpPr>
+          <p:cNvPr id="2" name="Rectangle 1"/>
+          <p:cNvSpPr/>
+          <p:nvPr/>
+        </p:nvSpPr>
+        <p:spPr>
+          <a:xfrm>
+            <a:off x="0" y="0"/>
+            <a:ext cx="12192000" cy="1150000"/>
+          </a:xfrm>
+          <a:prstGeom prst="rect">
+            <a:avLst/>
+          </a:prstGeom>
+          <a:solidFill>
+            <a:srgbClr val="010328"/>
+          </a:solidFill>
+          <a:ln>
+            <a:noFill/>
+          </a:ln>
+          <a:effectLst/>
+        </p:spPr>
+        <p:style>
+          <a:lnRef idx="1">
+            <a:schemeClr val="accent1"/>
+          </a:lnRef>
+          <a:fillRef idx="3">
+            <a:schemeClr val="accent1"/>
+          </a:fillRef>
+          <a:effectRef idx="2">
+            <a:schemeClr val="accent1"/>
+          </a:effectRef>
+          <a:fontRef idx="minor">
+            <a:schemeClr val="lt1"/>
+          </a:fontRef>
+        </p:style>
+        <p:txBody>
+          <a:bodyPr rtlCol="0" anchor="ctr"/>
+          <a:lstStyle/>
+          <a:p>
+            <a:pPr algn="ctr"/>
+          </a:p>
+        </p:txBody>
+      </p:sp>
+      <p:sp>
+        <p:nvSpPr>
+          <p:cNvPr id="3" name="Rectangle 2"/>
+          <p:cNvSpPr/>
+          <p:nvPr/>
+        </p:nvSpPr>
+        <p:spPr>
+          <a:xfrm>
+            <a:off x="0" y="1150000"/>
+            <a:ext cx="2600000" cy="70000"/>
+          </a:xfrm>
+          <a:prstGeom prst="rect">
+            <a:avLst/>
+          </a:prstGeom>
+          <a:solidFill>
+            <a:srgbClr val="F5670F"/>
+          </a:solidFill>
+          <a:ln>
+            <a:noFill/>
+          </a:ln>
+          <a:effectLst/>
+        </p:spPr>
+        <p:style>
+          <a:lnRef idx="1">
+            <a:schemeClr val="accent1"/>
+          </a:lnRef>
+          <a:fillRef idx="3">
+            <a:schemeClr val="accent1"/>
+          </a:fillRef>
+          <a:effectRef idx="2">
+            <a:schemeClr val="accent1"/>
+          </a:effectRef>
+          <a:fontRef idx="minor">
+            <a:schemeClr val="lt1"/>
+          </a:fontRef>
+        </p:style>
+        <p:txBody>
+          <a:bodyPr rtlCol="0" anchor="ctr"/>
+          <a:lstStyle/>
+          <a:p>
+            <a:pPr algn="ctr"/>
+          </a:p>
+        </p:txBody>
+      </p:sp>
+      <p:sp>
+        <p:nvSpPr>
+          <p:cNvPr id="4" name="TextBox 3"/>
+          <p:cNvSpPr txBox="1"/>
+          <p:nvPr/>
+        </p:nvSpPr>
+        <p:spPr>
+          <a:xfrm>
+            <a:off x="700000" y="300000"/>
+            <a:ext cx="10792000" cy="700000"/>
+          </a:xfrm>
+          <a:prstGeom prst="rect">
+            <a:avLst/>
+          </a:prstGeom>
+          <a:noFill/>
+        </p:spPr>
+        <p:txBody>
+          <a:bodyPr wrap="square" anchor="t">
+            <a:spAutoFit/>
+          </a:bodyPr>
+          <a:lstStyle/>
+          <a:p>
+            <a:pPr algn="l">
+              <a:lnSpc>
+                <a:spcPct val="110000"/>
+              </a:lnSpc>
+              <a:spcAft>
+                <a:spcPts val="600"/>
+              </a:spcAft>
+            </a:pPr>
+            <a:r>
+              <a:rPr sz="2400" b="1">
+                <a:solidFill>
+                  <a:srgbClr val="FFFFFF"/>
+                </a:solidFill>
+                <a:latin typeface="微软雅黑"/>
+              </a:rPr>
+              <a:t>实测验收 · m51_multiagent</a:t>
+            </a:r>
+          </a:p>
+        </p:txBody>
+      </p:sp>
+      <p:sp>
+        <p:nvSpPr>
+          <p:cNvPr id="11" name="Rectangle 10"/>
+          <p:cNvSpPr/>
+          <p:nvPr/>
+        </p:nvSpPr>
+        <p:spPr>
+          <a:xfrm>
+            <a:off x="500000" y="6500000"/>
+            <a:ext cx="11100000" cy="20000"/>
+          </a:xfrm>
+          <a:prstGeom prst="rect">
+            <a:avLst/>
+          </a:prstGeom>
+          <a:solidFill>
+            <a:srgbClr val="C9D4EE"/>
+          </a:solidFill>
+          <a:ln>
+            <a:noFill/>
+          </a:ln>
+          <a:effectLst/>
+        </p:spPr>
+        <p:style>
+          <a:lnRef idx="1">
+            <a:schemeClr val="accent1"/>
+          </a:lnRef>
+          <a:fillRef idx="3">
+            <a:schemeClr val="accent1"/>
+          </a:fillRef>
+          <a:effectRef idx="2">
+            <a:schemeClr val="accent1"/>
+          </a:effectRef>
+          <a:fontRef idx="minor">
+            <a:schemeClr val="lt1"/>
+          </a:fontRef>
+        </p:style>
+        <p:txBody>
+          <a:bodyPr rtlCol="0" anchor="ctr"/>
+          <a:lstStyle/>
+          <a:p>
+            <a:pPr algn="ctr"/>
+          </a:p>
+        </p:txBody>
+      </p:sp>
+      <p:sp>
+        <p:nvSpPr>
+          <p:cNvPr id="12" name="TextBox 11"/>
+          <p:cNvSpPr txBox="1"/>
+          <p:nvPr/>
+        </p:nvSpPr>
+        <p:spPr>
+          <a:xfrm>
+            <a:off x="500000" y="6540000"/>
+            <a:ext cx="7000000" cy="300000"/>
+          </a:xfrm>
+          <a:prstGeom prst="rect">
+            <a:avLst/>
+          </a:prstGeom>
+          <a:noFill/>
+        </p:spPr>
+        <p:txBody>
+          <a:bodyPr wrap="square" anchor="t">
+            <a:spAutoFit/>
+          </a:bodyPr>
+          <a:lstStyle/>
+          <a:p>
+            <a:pPr algn="l">
+              <a:lnSpc>
+                <a:spcPct val="110000"/>
+              </a:lnSpc>
+              <a:spcAft>
+                <a:spcPts val="600"/>
+              </a:spcAft>
+            </a:pPr>
+            <a:r>
+              <a:rPr sz="1000" b="0">
+                <a:solidFill>
+                  <a:srgbClr val="8A97B5"/>
+                </a:solidFill>
+                <a:latin typeface="微软雅黑"/>
+              </a:rPr>
+              <a:t>两江智造集团 · AI应用基础48课时版</a:t>
+            </a:r>
+          </a:p>
+        </p:txBody>
+      </p:sp>
+      <p:sp>
+        <p:nvSpPr>
+          <p:cNvPr id="13" name="TextBox 12"/>
+          <p:cNvSpPr txBox="1"/>
+          <p:nvPr/>
+        </p:nvSpPr>
+        <p:spPr>
+          <a:xfrm>
+            <a:off x="10600000" y="6540000"/>
+            <a:ext cx="1000000" cy="300000"/>
+          </a:xfrm>
+          <a:prstGeom prst="rect">
+            <a:avLst/>
+          </a:prstGeom>
+          <a:noFill/>
+        </p:spPr>
+        <p:txBody>
+          <a:bodyPr wrap="square" anchor="t">
+            <a:spAutoFit/>
+          </a:bodyPr>
+          <a:lstStyle/>
+          <a:p>
+            <a:pPr algn="r">
+              <a:lnSpc>
+                <a:spcPct val="110000"/>
+              </a:lnSpc>
+              <a:spcAft>
+                <a:spcPts val="600"/>
+              </a:spcAft>
+            </a:pPr>
+            <a:r>
+              <a:rPr sz="1000" b="0">
+                <a:solidFill>
+                  <a:srgbClr val="8A97B5"/>
+                </a:solidFill>
+                <a:latin typeface="微软雅黑"/>
+              </a:rPr>
+              <a:t>8 / 12</a:t>
+            </a:r>
+          </a:p>
+        </p:txBody>
+      </p:sp>
+      <p:sp>
+        <p:nvSpPr>
+          <p:cNvPr id="14" name="Rectangle 13"/>
+          <p:cNvSpPr/>
+          <p:nvPr/>
+        </p:nvSpPr>
+        <p:spPr>
+          <a:xfrm>
+            <a:off x="0" y="1371600"/>
+            <a:ext cx="12188952" cy="713232"/>
+          </a:xfrm>
+          <a:prstGeom prst="rect">
+            <a:avLst/>
+          </a:prstGeom>
+          <a:solidFill>
+            <a:srgbClr val="F2F5F9"/>
+          </a:solidFill>
+          <a:ln>
+            <a:noFill/>
+          </a:ln>
+          <a:effectLst/>
+        </p:spPr>
+        <p:style>
+          <a:lnRef idx="1">
+            <a:schemeClr val="accent1"/>
+          </a:lnRef>
+          <a:fillRef idx="3">
+            <a:schemeClr val="accent1"/>
+          </a:fillRef>
+          <a:effectRef idx="2">
+            <a:schemeClr val="accent1"/>
+          </a:effectRef>
+          <a:fontRef idx="minor">
+            <a:schemeClr val="lt1"/>
+          </a:fontRef>
+        </p:style>
+        <p:txBody>
+          <a:bodyPr rtlCol="0" anchor="ctr" wrap="square"/>
+          <a:lstStyle/>
+          <a:p>
+            <a:pPr algn="ctr"/>
+          </a:p>
+        </p:txBody>
+      </p:sp>
+      <p:sp>
+        <p:nvSpPr>
+          <p:cNvPr id="15" name="TextBox 14"/>
+          <p:cNvSpPr txBox="1"/>
+          <p:nvPr/>
+        </p:nvSpPr>
+        <p:spPr>
+          <a:xfrm>
+            <a:off x="457200" y="1426464"/>
+            <a:ext cx="2651760" cy="566928"/>
+          </a:xfrm>
+          <a:prstGeom prst="rect">
+            <a:avLst/>
+          </a:prstGeom>
+          <a:noFill/>
+        </p:spPr>
+        <p:txBody>
+          <a:bodyPr wrap="square">
+            <a:spAutoFit/>
+          </a:bodyPr>
+          <a:lstStyle/>
+          <a:p>
+            <a:r>
+              <a:rPr sz="1400" b="1">
+                <a:solidFill>
+                  <a:srgbClr val="2E7D46"/>
+                </a:solidFill>
+                <a:latin typeface="微软雅黑"/>
+              </a:rPr>
+              <a:t>实测达成档位</a:t>
+            </a:r>
+          </a:p>
+          <a:p>
+            <a:r>
+              <a:rPr sz="1400" b="1">
+                <a:solidFill>
+                  <a:srgbClr val="2E7D46"/>
+                </a:solidFill>
+                <a:latin typeface="微软雅黑"/>
+              </a:rPr>
+              <a:t>优(A)</a:t>
+            </a:r>
+          </a:p>
+        </p:txBody>
+      </p:sp>
+      <p:sp>
+        <p:nvSpPr>
+          <p:cNvPr id="16" name="Rectangle 15"/>
+          <p:cNvSpPr/>
+          <p:nvPr/>
+        </p:nvSpPr>
+        <p:spPr>
+          <a:xfrm>
+            <a:off x="3200400" y="1426464"/>
+            <a:ext cx="1627632" cy="603504"/>
+          </a:xfrm>
+          <a:prstGeom prst="rect">
+            <a:avLst/>
+          </a:prstGeom>
+          <a:solidFill>
+            <a:srgbClr val="FFFFFF"/>
+          </a:solidFill>
+          <a:ln>
+            <a:solidFill>
+              <a:srgbClr val="D6DCE4"/>
+            </a:solidFill>
+          </a:ln>
+          <a:effectLst/>
+        </p:spPr>
+        <p:style>
+          <a:lnRef idx="1">
+            <a:schemeClr val="accent1"/>
+          </a:lnRef>
+          <a:fillRef idx="3">
+            <a:schemeClr val="accent1"/>
+          </a:fillRef>
+          <a:effectRef idx="2">
+            <a:schemeClr val="accent1"/>
+          </a:effectRef>
+          <a:fontRef idx="minor">
+            <a:schemeClr val="lt1"/>
+          </a:fontRef>
+        </p:style>
+        <p:txBody>
+          <a:bodyPr rtlCol="0" anchor="ctr" wrap="square"/>
+          <a:lstStyle/>
+          <a:p>
+            <a:pPr algn="ctr"/>
+          </a:p>
+        </p:txBody>
+      </p:sp>
+      <p:sp>
+        <p:nvSpPr>
+          <p:cNvPr id="17" name="TextBox 16"/>
+          <p:cNvSpPr txBox="1"/>
+          <p:nvPr/>
+        </p:nvSpPr>
+        <p:spPr>
+          <a:xfrm>
+            <a:off x="3246120" y="1463040"/>
+            <a:ext cx="1536192" cy="548640"/>
+          </a:xfrm>
+          <a:prstGeom prst="rect">
+            <a:avLst/>
+          </a:prstGeom>
+          <a:noFill/>
+        </p:spPr>
+        <p:txBody>
+          <a:bodyPr wrap="square">
+            <a:spAutoFit/>
+          </a:bodyPr>
+          <a:lstStyle/>
+          <a:p>
+            <a:r>
+              <a:rPr sz="900" b="0">
+                <a:solidFill>
+                  <a:srgbClr val="35506E"/>
+                </a:solidFill>
+                <a:latin typeface="微软雅黑"/>
+              </a:rPr>
+              <a:t>同种子二次运行逐键相等=是</a:t>
+            </a:r>
+          </a:p>
+        </p:txBody>
+      </p:sp>
+      <p:sp>
+        <p:nvSpPr>
+          <p:cNvPr id="18" name="Rectangle 17"/>
+          <p:cNvSpPr/>
+          <p:nvPr/>
+        </p:nvSpPr>
+        <p:spPr>
+          <a:xfrm>
+            <a:off x="4901184" y="1426464"/>
+            <a:ext cx="1627632" cy="603504"/>
+          </a:xfrm>
+          <a:prstGeom prst="rect">
+            <a:avLst/>
+          </a:prstGeom>
+          <a:solidFill>
+            <a:srgbClr val="FFFFFF"/>
+          </a:solidFill>
+          <a:ln>
+            <a:solidFill>
+              <a:srgbClr val="D6DCE4"/>
+            </a:solidFill>
+          </a:ln>
+          <a:effectLst/>
+        </p:spPr>
+        <p:style>
+          <a:lnRef idx="1">
+            <a:schemeClr val="accent1"/>
+          </a:lnRef>
+          <a:fillRef idx="3">
+            <a:schemeClr val="accent1"/>
+          </a:fillRef>
+          <a:effectRef idx="2">
+            <a:schemeClr val="accent1"/>
+          </a:effectRef>
+          <a:fontRef idx="minor">
+            <a:schemeClr val="lt1"/>
+          </a:fontRef>
+        </p:style>
+        <p:txBody>
+          <a:bodyPr rtlCol="0" anchor="ctr" wrap="square"/>
+          <a:lstStyle/>
+          <a:p>
+            <a:pPr algn="ctr"/>
+          </a:p>
+        </p:txBody>
+      </p:sp>
+      <p:sp>
+        <p:nvSpPr>
+          <p:cNvPr id="19" name="TextBox 18"/>
+          <p:cNvSpPr txBox="1"/>
+          <p:nvPr/>
+        </p:nvSpPr>
+        <p:spPr>
+          <a:xfrm>
+            <a:off x="4946904" y="1463040"/>
+            <a:ext cx="1536192" cy="548640"/>
+          </a:xfrm>
+          <a:prstGeom prst="rect">
+            <a:avLst/>
+          </a:prstGeom>
+          <a:noFill/>
+        </p:spPr>
+        <p:txBody>
+          <a:bodyPr wrap="square">
+            <a:spAutoFit/>
+          </a:bodyPr>
+          <a:lstStyle/>
+          <a:p>
+            <a:r>
+              <a:rPr sz="900" b="0">
+                <a:solidFill>
+                  <a:srgbClr val="35506E"/>
+                </a:solidFill>
+                <a:latin typeface="微软雅黑"/>
+              </a:rPr>
+              <a:t>手写基线最高正确率 100.0%</a:t>
+            </a:r>
+          </a:p>
+        </p:txBody>
+      </p:sp>
+      <p:sp>
+        <p:nvSpPr>
+          <p:cNvPr id="20" name="Rectangle 19"/>
+          <p:cNvSpPr/>
+          <p:nvPr/>
+        </p:nvSpPr>
+        <p:spPr>
+          <a:xfrm>
+            <a:off x="6601968" y="1426464"/>
+            <a:ext cx="1627632" cy="603504"/>
+          </a:xfrm>
+          <a:prstGeom prst="rect">
+            <a:avLst/>
+          </a:prstGeom>
+          <a:solidFill>
+            <a:srgbClr val="FFFFFF"/>
+          </a:solidFill>
+          <a:ln>
+            <a:solidFill>
+              <a:srgbClr val="D6DCE4"/>
+            </a:solidFill>
+          </a:ln>
+          <a:effectLst/>
+        </p:spPr>
+        <p:style>
+          <a:lnRef idx="1">
+            <a:schemeClr val="accent1"/>
+          </a:lnRef>
+          <a:fillRef idx="3">
+            <a:schemeClr val="accent1"/>
+          </a:fillRef>
+          <a:effectRef idx="2">
+            <a:schemeClr val="accent1"/>
+          </a:effectRef>
+          <a:fontRef idx="minor">
+            <a:schemeClr val="lt1"/>
+          </a:fontRef>
+        </p:style>
+        <p:txBody>
+          <a:bodyPr rtlCol="0" anchor="ctr" wrap="square"/>
+          <a:lstStyle/>
+          <a:p>
+            <a:pPr algn="ctr"/>
+          </a:p>
+        </p:txBody>
+      </p:sp>
+      <p:sp>
+        <p:nvSpPr>
+          <p:cNvPr id="21" name="TextBox 20"/>
+          <p:cNvSpPr txBox="1"/>
+          <p:nvPr/>
+        </p:nvSpPr>
+        <p:spPr>
+          <a:xfrm>
+            <a:off x="6647688" y="1463040"/>
+            <a:ext cx="1536192" cy="548640"/>
+          </a:xfrm>
+          <a:prstGeom prst="rect">
+            <a:avLst/>
+          </a:prstGeom>
+          <a:noFill/>
+        </p:spPr>
+        <p:txBody>
+          <a:bodyPr wrap="square">
+            <a:spAutoFit/>
+          </a:bodyPr>
+          <a:lstStyle/>
+          <a:p>
+            <a:r>
+              <a:rPr sz="900" b="0">
+                <a:solidFill>
+                  <a:srgbClr val="35506E"/>
+                </a:solidFill>
+                <a:latin typeface="微软雅黑"/>
+              </a:rPr>
+              <a:t>说明书实测 620 字</a:t>
+            </a:r>
+          </a:p>
+        </p:txBody>
+      </p:sp>
+      <p:sp>
+        <p:nvSpPr>
+          <p:cNvPr id="22" name="Rectangle 21"/>
+          <p:cNvSpPr/>
+          <p:nvPr/>
+        </p:nvSpPr>
+        <p:spPr>
+          <a:xfrm>
+            <a:off x="8302752" y="1426464"/>
+            <a:ext cx="1627632" cy="603504"/>
+          </a:xfrm>
+          <a:prstGeom prst="rect">
+            <a:avLst/>
+          </a:prstGeom>
+          <a:solidFill>
+            <a:srgbClr val="FFFFFF"/>
+          </a:solidFill>
+          <a:ln>
+            <a:solidFill>
+              <a:srgbClr val="D6DCE4"/>
+            </a:solidFill>
+          </a:ln>
+          <a:effectLst/>
+        </p:spPr>
+        <p:style>
+          <a:lnRef idx="1">
+            <a:schemeClr val="accent1"/>
+          </a:lnRef>
+          <a:fillRef idx="3">
+            <a:schemeClr val="accent1"/>
+          </a:fillRef>
+          <a:effectRef idx="2">
+            <a:schemeClr val="accent1"/>
+          </a:effectRef>
+          <a:fontRef idx="minor">
+            <a:schemeClr val="lt1"/>
+          </a:fontRef>
+        </p:style>
+        <p:txBody>
+          <a:bodyPr rtlCol="0" anchor="ctr" wrap="square"/>
+          <a:lstStyle/>
+          <a:p>
+            <a:pPr algn="ctr"/>
+          </a:p>
+        </p:txBody>
+      </p:sp>
+      <p:sp>
+        <p:nvSpPr>
+          <p:cNvPr id="23" name="TextBox 22"/>
+          <p:cNvSpPr txBox="1"/>
+          <p:nvPr/>
+        </p:nvSpPr>
+        <p:spPr>
+          <a:xfrm>
+            <a:off x="8348472" y="1463040"/>
+            <a:ext cx="1536192" cy="548640"/>
+          </a:xfrm>
+          <a:prstGeom prst="rect">
+            <a:avLst/>
+          </a:prstGeom>
+          <a:noFill/>
+        </p:spPr>
+        <p:txBody>
+          <a:bodyPr wrap="square">
+            <a:spAutoFit/>
+          </a:bodyPr>
+          <a:lstStyle/>
+          <a:p>
+            <a:r>
+              <a:rPr sz="900" b="0">
+                <a:solidFill>
+                  <a:srgbClr val="35506E"/>
+                </a:solidFill>
+                <a:latin typeface="微软雅黑"/>
+              </a:rPr>
+              <a:t>漏洞修复成对证据：修复前假派检 162 次且修复后总奖励 Δ-1134.0（套</a:t>
+            </a:r>
+          </a:p>
+        </p:txBody>
+      </p:sp>
+      <p:sp>
+        <p:nvSpPr>
+          <p:cNvPr id="24" name="Rectangle 23"/>
+          <p:cNvSpPr/>
+          <p:nvPr/>
+        </p:nvSpPr>
+        <p:spPr>
+          <a:xfrm>
+            <a:off x="10003536" y="1426464"/>
+            <a:ext cx="1627632" cy="603504"/>
+          </a:xfrm>
+          <a:prstGeom prst="rect">
+            <a:avLst/>
+          </a:prstGeom>
+          <a:solidFill>
+            <a:srgbClr val="FFFFFF"/>
+          </a:solidFill>
+          <a:ln>
+            <a:solidFill>
+              <a:srgbClr val="D6DCE4"/>
+            </a:solidFill>
+          </a:ln>
+          <a:effectLst/>
+        </p:spPr>
+        <p:style>
+          <a:lnRef idx="1">
+            <a:schemeClr val="accent1"/>
+          </a:lnRef>
+          <a:fillRef idx="3">
+            <a:schemeClr val="accent1"/>
+          </a:fillRef>
+          <a:effectRef idx="2">
+            <a:schemeClr val="accent1"/>
+          </a:effectRef>
+          <a:fontRef idx="minor">
+            <a:schemeClr val="lt1"/>
+          </a:fontRef>
+        </p:style>
+        <p:txBody>
+          <a:bodyPr rtlCol="0" anchor="ctr" wrap="square"/>
+          <a:lstStyle/>
+          <a:p>
+            <a:pPr algn="ctr"/>
+          </a:p>
+        </p:txBody>
+      </p:sp>
+      <p:sp>
+        <p:nvSpPr>
+          <p:cNvPr id="25" name="TextBox 24"/>
+          <p:cNvSpPr txBox="1"/>
+          <p:nvPr/>
+        </p:nvSpPr>
+        <p:spPr>
+          <a:xfrm>
+            <a:off x="10049256" y="1463040"/>
+            <a:ext cx="1536192" cy="548640"/>
+          </a:xfrm>
+          <a:prstGeom prst="rect">
+            <a:avLst/>
+          </a:prstGeom>
+          <a:noFill/>
+        </p:spPr>
+        <p:txBody>
+          <a:bodyPr wrap="square">
+            <a:spAutoFit/>
+          </a:bodyPr>
+          <a:lstStyle/>
+          <a:p>
+            <a:r>
+              <a:rPr sz="900" b="0">
+                <a:solidFill>
+                  <a:srgbClr val="35506E"/>
+                </a:solidFill>
+                <a:latin typeface="微软雅黑"/>
+              </a:rPr>
+              <a:t>未见种子泛化实测正确率 100.0%（10 集）</a:t>
+            </a:r>
+          </a:p>
+        </p:txBody>
+      </p:sp>
+      <p:graphicFrame>
+        <p:nvGraphicFramePr>
+          <p:cNvPr id="26" name="Table 25"/>
+          <p:cNvGraphicFramePr>
+            <a:graphicFrameLocks noGrp="1"/>
+          </p:cNvGraphicFramePr>
+          <p:nvPr/>
+        </p:nvGraphicFramePr>
+        <p:xfrm>
+          <a:off x="457200" y="2212848"/>
+          <a:ext cx="11274552" cy="2834640"/>
+        </p:xfrm>
+        <a:graphic>
+          <a:graphicData uri="http://schemas.openxmlformats.org/drawingml/2006/table">
+            <a:tbl>
+              <a:tblPr firstRow="1" bandRow="1">
+                <a:tableStyleId>{5C22544A-7EE6-4342-B048-85BDC9FD1C3A}</a:tableStyleId>
+              </a:tblPr>
+              <a:tblGrid>
+                <a:gridCol w="1188720"/>
+                <a:gridCol w="5120640"/>
+                <a:gridCol w="3886200"/>
+                <a:gridCol w="1078992"/>
+              </a:tblGrid>
+              <a:tr h="566928">
+                <a:tc>
+                  <a:txBody>
+                    <a:bodyPr/>
+                    <a:lstStyle/>
+                    <a:p>
+                      <a:r>
+                        <a:rPr sz="1050" b="1">
+                          <a:solidFill>
+                            <a:srgbClr val="FFFFFF"/>
+                          </a:solidFill>
+                          <a:latin typeface="微软雅黑"/>
+                        </a:rPr>
+                        <a:t>档位</a:t>
+                      </a:r>
+                    </a:p>
+                  </a:txBody>
+                  <a:tcPr>
+                    <a:solidFill>
+                      <a:srgbClr val="010328"/>
+                    </a:solidFill>
+                  </a:tcPr>
+                </a:tc>
+                <a:tc>
+                  <a:txBody>
+                    <a:bodyPr/>
+                    <a:lstStyle/>
+                    <a:p>
+                      <a:r>
+                        <a:rPr sz="1050" b="1">
+                          <a:solidFill>
+                            <a:srgbClr val="FFFFFF"/>
+                          </a:solidFill>
+                          <a:latin typeface="微软雅黑"/>
+                        </a:rPr>
+                        <a:t>工单验收标准（原文）</a:t>
+                      </a:r>
+                    </a:p>
+                  </a:txBody>
+                  <a:tcPr>
+                    <a:solidFill>
+                      <a:srgbClr val="010328"/>
+                    </a:solidFill>
+                  </a:tcPr>
+                </a:tc>
+                <a:tc>
+                  <a:txBody>
+                    <a:bodyPr/>
+                    <a:lstStyle/>
+                    <a:p>
+                      <a:r>
+                        <a:rPr sz="1050" b="1">
+                          <a:solidFill>
+                            <a:srgbClr val="FFFFFF"/>
+                          </a:solidFill>
+                          <a:latin typeface="微软雅黑"/>
+                        </a:rPr>
+                        <a:t>本次实测判定</a:t>
+                      </a:r>
+                    </a:p>
+                  </a:txBody>
+                  <a:tcPr>
+                    <a:solidFill>
+                      <a:srgbClr val="010328"/>
+                    </a:solidFill>
+                  </a:tcPr>
+                </a:tc>
+                <a:tc>
+                  <a:txBody>
+                    <a:bodyPr/>
+                    <a:lstStyle/>
+                    <a:p>
+                      <a:r>
+                        <a:rPr sz="1050" b="1">
+                          <a:solidFill>
+                            <a:srgbClr val="FFFFFF"/>
+                          </a:solidFill>
+                          <a:latin typeface="微软雅黑"/>
+                        </a:rPr>
+                        <a:t>判定</a:t>
+                      </a:r>
+                    </a:p>
+                  </a:txBody>
+                  <a:tcPr>
+                    <a:solidFill>
+                      <a:srgbClr val="010328"/>
+                    </a:solidFill>
+                  </a:tcPr>
+                </a:tc>
+              </a:tr>
+              <a:tr h="566928">
+                <a:tc>
+                  <a:txBody>
+                    <a:bodyPr/>
+                    <a:lstStyle/>
+                    <a:p>
+                      <a:r>
+                        <a:rPr sz="1000" b="1">
+                          <a:solidFill>
+                            <a:srgbClr val="2B2F36"/>
+                          </a:solidFill>
+                          <a:latin typeface="微软雅黑"/>
+                        </a:rPr>
+                        <a:t>及格(D)</a:t>
+                      </a:r>
+                    </a:p>
+                  </a:txBody>
+                  <a:tcPr>
+                    <a:solidFill>
+                      <a:srgbClr val="FFFFFF"/>
+                    </a:solidFill>
+                  </a:tcPr>
+                </a:tc>
+                <a:tc>
+                  <a:txBody>
+                    <a:bodyPr/>
+                    <a:lstStyle/>
+                    <a:p>
+                      <a:r>
+                        <a:rPr sz="950" b="0">
+                          <a:solidFill>
+                            <a:srgbClr val="2B2F36"/>
+                          </a:solidFill>
+                          <a:latin typeface="微软雅黑"/>
+                        </a:rPr>
+                        <a:t>基线数据可复现；代码规范率≥70%</a:t>
+                      </a:r>
+                    </a:p>
+                  </a:txBody>
+                  <a:tcPr>
+                    <a:solidFill>
+                      <a:srgbClr val="FFFFFF"/>
+                    </a:solidFill>
+                  </a:tcPr>
+                </a:tc>
+                <a:tc>
+                  <a:txBody>
+                    <a:bodyPr/>
+                    <a:lstStyle/>
+                    <a:p>
+                      <a:r>
+                        <a:rPr sz="950" b="0">
+                          <a:solidFill>
+                            <a:srgbClr val="2B2F36"/>
+                          </a:solidFill>
+                          <a:latin typeface="微软雅黑"/>
+                        </a:rPr>
+                        <a:t>规范率门槛≥70% [达标] ｜ 功能OK</a:t>
+                      </a:r>
+                    </a:p>
+                  </a:txBody>
+                  <a:tcPr>
+                    <a:solidFill>
+                      <a:srgbClr val="FFFFFF"/>
+                    </a:solidFill>
+                  </a:tcPr>
+                </a:tc>
+                <a:tc>
+                  <a:txBody>
+                    <a:bodyPr/>
+                    <a:lstStyle/>
+                    <a:p>
+                      <a:r>
+                        <a:rPr sz="1000" b="1">
+                          <a:solidFill>
+                            <a:srgbClr val="2E7D46"/>
+                          </a:solidFill>
+                          <a:latin typeface="微软雅黑"/>
+                        </a:rPr>
+                        <a:t>✓ 达标</a:t>
+                      </a:r>
+                    </a:p>
+                  </a:txBody>
+                  <a:tcPr>
+                    <a:solidFill>
+                      <a:srgbClr val="FFFFFF"/>
+                    </a:solidFill>
+                  </a:tcPr>
+                </a:tc>
+              </a:tr>
+              <a:tr h="566928">
+                <a:tc>
+                  <a:txBody>
+                    <a:bodyPr/>
+                    <a:lstStyle/>
+                    <a:p>
+                      <a:r>
+                        <a:rPr sz="1000" b="1">
+                          <a:solidFill>
+                            <a:srgbClr val="2B2F36"/>
+                          </a:solidFill>
+                          <a:latin typeface="微软雅黑"/>
+                        </a:rPr>
+                        <a:t>良好(C)</a:t>
+                      </a:r>
+                    </a:p>
+                  </a:txBody>
+                  <a:tcPr>
+                    <a:solidFill>
+                      <a:srgbClr val="F7F9FB"/>
+                    </a:solidFill>
+                  </a:tcPr>
+                </a:tc>
+                <a:tc>
+                  <a:txBody>
+                    <a:bodyPr/>
+                    <a:lstStyle/>
+                    <a:p>
+                      <a:r>
+                        <a:rPr sz="950" b="0">
+                          <a:solidFill>
+                            <a:srgbClr val="2B2F36"/>
+                          </a:solidFill>
+                          <a:latin typeface="微软雅黑"/>
+                        </a:rPr>
+                        <a:t>正确率≥75%加说明书</a:t>
+                      </a:r>
+                    </a:p>
+                  </a:txBody>
+                  <a:tcPr>
+                    <a:solidFill>
+                      <a:srgbClr val="F7F9FB"/>
+                    </a:solidFill>
+                  </a:tcPr>
+                </a:tc>
+                <a:tc>
+                  <a:txBody>
+                    <a:bodyPr/>
+                    <a:lstStyle/>
+                    <a:p>
+                      <a:r>
+                        <a:rPr sz="950" b="0">
+                          <a:solidFill>
+                            <a:srgbClr val="2B2F36"/>
+                          </a:solidFill>
+                          <a:latin typeface="微软雅黑"/>
+                        </a:rPr>
+                        <a:t>功能OK</a:t>
+                      </a:r>
+                    </a:p>
+                  </a:txBody>
+                  <a:tcPr>
+                    <a:solidFill>
+                      <a:srgbClr val="F7F9FB"/>
+                    </a:solidFill>
+                  </a:tcPr>
+                </a:tc>
+                <a:tc>
+                  <a:txBody>
+                    <a:bodyPr/>
+                    <a:lstStyle/>
+                    <a:p>
+                      <a:r>
+                        <a:rPr sz="1000" b="1">
+                          <a:solidFill>
+                            <a:srgbClr val="2E7D46"/>
+                          </a:solidFill>
+                          <a:latin typeface="微软雅黑"/>
+                        </a:rPr>
+                        <a:t>✓ 达标</a:t>
+                      </a:r>
+                    </a:p>
+                  </a:txBody>
+                  <a:tcPr>
+                    <a:solidFill>
+                      <a:srgbClr val="F7F9FB"/>
+                    </a:solidFill>
+                  </a:tcPr>
+                </a:tc>
+              </a:tr>
+              <a:tr h="566928">
+                <a:tc>
+                  <a:txBody>
+                    <a:bodyPr/>
+                    <a:lstStyle/>
+                    <a:p>
+                      <a:r>
+                        <a:rPr sz="1000" b="1">
+                          <a:solidFill>
+                            <a:srgbClr val="2B2F36"/>
+                          </a:solidFill>
+                          <a:latin typeface="微软雅黑"/>
+                        </a:rPr>
+                        <a:t>优秀(B)</a:t>
+                      </a:r>
+                    </a:p>
+                  </a:txBody>
+                  <a:tcPr>
+                    <a:solidFill>
+                      <a:srgbClr val="FFFFFF"/>
+                    </a:solidFill>
+                  </a:tcPr>
+                </a:tc>
+                <a:tc>
+                  <a:txBody>
+                    <a:bodyPr/>
+                    <a:lstStyle/>
+                    <a:p>
+                      <a:r>
+                        <a:rPr sz="950" b="0">
+                          <a:solidFill>
+                            <a:srgbClr val="2B2F36"/>
+                          </a:solidFill>
+                          <a:latin typeface="微软雅黑"/>
+                        </a:rPr>
+                        <a:t>修复1个漏洞有证据；决策记录完整</a:t>
+                      </a:r>
+                    </a:p>
+                  </a:txBody>
+                  <a:tcPr>
+                    <a:solidFill>
+                      <a:srgbClr val="FFFFFF"/>
+                    </a:solidFill>
+                  </a:tcPr>
+                </a:tc>
+                <a:tc>
+                  <a:txBody>
+                    <a:bodyPr/>
+                    <a:lstStyle/>
+                    <a:p>
+                      <a:r>
+                        <a:rPr sz="950" b="0">
+                          <a:solidFill>
+                            <a:srgbClr val="2B2F36"/>
+                          </a:solidFill>
+                          <a:latin typeface="微软雅黑"/>
+                        </a:rPr>
+                        <a:t>功能OK</a:t>
+                      </a:r>
+                    </a:p>
+                  </a:txBody>
+                  <a:tcPr>
+                    <a:solidFill>
+                      <a:srgbClr val="FFFFFF"/>
+                    </a:solidFill>
+                  </a:tcPr>
+                </a:tc>
+                <a:tc>
+                  <a:txBody>
+                    <a:bodyPr/>
+                    <a:lstStyle/>
+                    <a:p>
+                      <a:r>
+                        <a:rPr sz="1000" b="1">
+                          <a:solidFill>
+                            <a:srgbClr val="2E7D46"/>
+                          </a:solidFill>
+                          <a:latin typeface="微软雅黑"/>
+                        </a:rPr>
+                        <a:t>✓ 达标</a:t>
+                      </a:r>
+                    </a:p>
+                  </a:txBody>
+                  <a:tcPr>
+                    <a:solidFill>
+                      <a:srgbClr val="FFFFFF"/>
+                    </a:solidFill>
+                  </a:tcPr>
+                </a:tc>
+              </a:tr>
+              <a:tr h="566928">
+                <a:tc>
+                  <a:txBody>
+                    <a:bodyPr/>
+                    <a:lstStyle/>
+                    <a:p>
+                      <a:r>
+                        <a:rPr sz="1000" b="1">
+                          <a:solidFill>
+                            <a:srgbClr val="2B2F36"/>
+                          </a:solidFill>
+                          <a:latin typeface="微软雅黑"/>
+                        </a:rPr>
+                        <a:t>优(A)</a:t>
+                      </a:r>
+                    </a:p>
+                  </a:txBody>
+                  <a:tcPr>
+                    <a:solidFill>
+                      <a:srgbClr val="F7F9FB"/>
+                    </a:solidFill>
+                  </a:tcPr>
+                </a:tc>
+                <a:tc>
+                  <a:txBody>
+                    <a:bodyPr/>
+                    <a:lstStyle/>
+                    <a:p>
+                      <a:r>
+                        <a:rPr sz="950" b="0">
+                          <a:solidFill>
+                            <a:srgbClr val="2B2F36"/>
+                          </a:solidFill>
+                          <a:latin typeface="微软雅黑"/>
+                        </a:rPr>
+                        <a:t>正确率≥90%或泛化实验</a:t>
+                      </a:r>
+                    </a:p>
+                  </a:txBody>
+                  <a:tcPr>
+                    <a:solidFill>
+                      <a:srgbClr val="F7F9FB"/>
+                    </a:solidFill>
+                  </a:tcPr>
+                </a:tc>
+                <a:tc>
+                  <a:txBody>
+                    <a:bodyPr/>
+                    <a:lstStyle/>
+                    <a:p>
+                      <a:r>
+                        <a:rPr sz="950" b="0">
+                          <a:solidFill>
+                            <a:srgbClr val="2B2F36"/>
+                          </a:solidFill>
+                          <a:latin typeface="微软雅黑"/>
+                        </a:rPr>
+                        <a:t>功能OK</a:t>
+                      </a:r>
+                    </a:p>
+                  </a:txBody>
+                  <a:tcPr>
+                    <a:solidFill>
+                      <a:srgbClr val="F7F9FB"/>
+                    </a:solidFill>
+                  </a:tcPr>
+                </a:tc>
+                <a:tc>
+                  <a:txBody>
+                    <a:bodyPr/>
+                    <a:lstStyle/>
+                    <a:p>
+                      <a:r>
+                        <a:rPr sz="1000" b="1">
+                          <a:solidFill>
+                            <a:srgbClr val="2E7D46"/>
+                          </a:solidFill>
+                          <a:latin typeface="微软雅黑"/>
+                        </a:rPr>
+                        <a:t>✓ 达标</a:t>
+                      </a:r>
+                    </a:p>
+                  </a:txBody>
+                  <a:tcPr>
+                    <a:solidFill>
+                      <a:srgbClr val="F7F9FB"/>
+                    </a:solidFill>
+                  </a:tcPr>
+                </a:tc>
+              </a:tr>
+            </a:tbl>
+          </a:graphicData>
+        </a:graphic>
+      </p:graphicFrame>
+      <p:sp>
+        <p:nvSpPr>
+          <p:cNvPr id="27" name="Rectangle 26"/>
+          <p:cNvSpPr/>
+          <p:nvPr/>
+        </p:nvSpPr>
+        <p:spPr>
+          <a:xfrm>
+            <a:off x="457200" y="5138928"/>
+            <a:ext cx="11274552" cy="1261872"/>
+          </a:xfrm>
+          <a:prstGeom prst="rect">
+            <a:avLst/>
+          </a:prstGeom>
+          <a:solidFill>
+            <a:srgbClr val="FFF7E8"/>
+          </a:solidFill>
+          <a:ln>
+            <a:solidFill>
+              <a:srgbClr val="E8C88A"/>
+            </a:solidFill>
+          </a:ln>
+          <a:effectLst/>
+        </p:spPr>
+        <p:style>
+          <a:lnRef idx="1">
+            <a:schemeClr val="accent1"/>
+          </a:lnRef>
+          <a:fillRef idx="3">
+            <a:schemeClr val="accent1"/>
+          </a:fillRef>
+          <a:effectRef idx="2">
+            <a:schemeClr val="accent1"/>
+          </a:effectRef>
+          <a:fontRef idx="minor">
+            <a:schemeClr val="lt1"/>
+          </a:fontRef>
+        </p:style>
+        <p:txBody>
+          <a:bodyPr rtlCol="0" anchor="ctr" wrap="square"/>
+          <a:lstStyle/>
+          <a:p>
+            <a:pPr algn="ctr"/>
+          </a:p>
+        </p:txBody>
+      </p:sp>
+      <p:sp>
+        <p:nvSpPr>
+          <p:cNvPr id="28" name="TextBox 27"/>
+          <p:cNvSpPr txBox="1"/>
+          <p:nvPr/>
+        </p:nvSpPr>
+        <p:spPr>
+          <a:xfrm>
+            <a:off x="621792" y="5212080"/>
+            <a:ext cx="10927080" cy="1133856"/>
+          </a:xfrm>
+          <a:prstGeom prst="rect">
+            <a:avLst/>
+          </a:prstGeom>
+          <a:noFill/>
+        </p:spPr>
+        <p:txBody>
+          <a:bodyPr wrap="square">
+            <a:spAutoFit/>
+          </a:bodyPr>
+          <a:lstStyle/>
+          <a:p>
+            <a:r>
+              <a:rPr sz="950" b="0">
+                <a:solidFill>
+                  <a:srgbClr val="6B4E16"/>
+                </a:solidFill>
+                <a:latin typeface="微软雅黑"/>
+              </a:rPr>
+              <a:t>人工答辩项 1 条（代码不代判，答辩现场确认，逐条见下页 report.txt 截图）</a:t>
+            </a:r>
+          </a:p>
+          <a:p>
+            <a:r>
+              <a:rPr sz="950" b="0">
+                <a:solidFill>
+                  <a:srgbClr val="6B4E16"/>
+                </a:solidFill>
+                <a:latin typeface="微软雅黑"/>
+              </a:rPr>
+              <a:t>档位是算出来的：判定值由 run.py 本次真跑产生；工单未给数字的门槛在报告里标注为「兜底口径·非工单数字」。</a:t>
+            </a:r>
+          </a:p>
+          <a:p>
+            <a:r>
+              <a:rPr sz="950" b="0">
+                <a:solidFill>
+                  <a:srgbClr val="6B4E16"/>
+                </a:solidFill>
+                <a:latin typeface="微软雅黑"/>
+              </a:rPr>
+              <a:t>实测值共 7 项，本页只列前 5 项，其余见下页 report.txt 截图。</a:t>
+            </a:r>
+          </a:p>
+        </p:txBody>
+      </p:sp>
+    </p:spTree>
+  </p:cSld>
+  <p:clrMapOvr>
+    <a:masterClrMapping/>
+  </p:clrMapOvr>
+</p:sld>
+</file>
+
+<file path=ppt/slides/slide12.xml><?xml version="1.0" encoding="utf-8"?>
+<p:sld xmlns:a="http://schemas.openxmlformats.org/drawingml/2006/main" xmlns:p="http://schemas.openxmlformats.org/presentationml/2006/main" xmlns:r="http://schemas.openxmlformats.org/officeDocument/2006/relationships">
+  <p:cSld>
+    <p:spTree>
+      <p:nvGrpSpPr>
+        <p:cNvPr id="1" name=""/>
+        <p:cNvGrpSpPr/>
+        <p:nvPr/>
+      </p:nvGrpSpPr>
+      <p:grpSpPr/>
+      <p:sp>
+        <p:nvSpPr>
+          <p:cNvPr id="2" name="Rectangle 1"/>
+          <p:cNvSpPr/>
+          <p:nvPr/>
+        </p:nvSpPr>
+        <p:spPr>
+          <a:xfrm>
+            <a:off x="0" y="0"/>
+            <a:ext cx="12192000" cy="1150000"/>
+          </a:xfrm>
+          <a:prstGeom prst="rect">
+            <a:avLst/>
+          </a:prstGeom>
+          <a:solidFill>
+            <a:srgbClr val="010328"/>
+          </a:solidFill>
+          <a:ln>
+            <a:noFill/>
+          </a:ln>
+          <a:effectLst/>
+        </p:spPr>
+        <p:style>
+          <a:lnRef idx="1">
+            <a:schemeClr val="accent1"/>
+          </a:lnRef>
+          <a:fillRef idx="3">
+            <a:schemeClr val="accent1"/>
+          </a:fillRef>
+          <a:effectRef idx="2">
+            <a:schemeClr val="accent1"/>
+          </a:effectRef>
+          <a:fontRef idx="minor">
+            <a:schemeClr val="lt1"/>
+          </a:fontRef>
+        </p:style>
+        <p:txBody>
+          <a:bodyPr rtlCol="0" anchor="ctr"/>
+          <a:lstStyle/>
+          <a:p>
+            <a:pPr algn="ctr"/>
+          </a:p>
+        </p:txBody>
+      </p:sp>
+      <p:sp>
+        <p:nvSpPr>
+          <p:cNvPr id="3" name="Rectangle 2"/>
+          <p:cNvSpPr/>
+          <p:nvPr/>
+        </p:nvSpPr>
+        <p:spPr>
+          <a:xfrm>
+            <a:off x="0" y="1150000"/>
+            <a:ext cx="2600000" cy="70000"/>
+          </a:xfrm>
+          <a:prstGeom prst="rect">
+            <a:avLst/>
+          </a:prstGeom>
+          <a:solidFill>
+            <a:srgbClr val="F5670F"/>
+          </a:solidFill>
+          <a:ln>
+            <a:noFill/>
+          </a:ln>
+          <a:effectLst/>
+        </p:spPr>
+        <p:style>
+          <a:lnRef idx="1">
+            <a:schemeClr val="accent1"/>
+          </a:lnRef>
+          <a:fillRef idx="3">
+            <a:schemeClr val="accent1"/>
+          </a:fillRef>
+          <a:effectRef idx="2">
+            <a:schemeClr val="accent1"/>
+          </a:effectRef>
+          <a:fontRef idx="minor">
+            <a:schemeClr val="lt1"/>
+          </a:fontRef>
+        </p:style>
+        <p:txBody>
+          <a:bodyPr rtlCol="0" anchor="ctr"/>
+          <a:lstStyle/>
+          <a:p>
+            <a:pPr algn="ctr"/>
+          </a:p>
+        </p:txBody>
+      </p:sp>
+      <p:sp>
+        <p:nvSpPr>
+          <p:cNvPr id="4" name="TextBox 3"/>
+          <p:cNvSpPr txBox="1"/>
+          <p:nvPr/>
+        </p:nvSpPr>
+        <p:spPr>
+          <a:xfrm>
+            <a:off x="700000" y="300000"/>
+            <a:ext cx="10792000" cy="700000"/>
+          </a:xfrm>
+          <a:prstGeom prst="rect">
+            <a:avLst/>
+          </a:prstGeom>
+          <a:noFill/>
+        </p:spPr>
+        <p:txBody>
+          <a:bodyPr wrap="square" anchor="t">
+            <a:spAutoFit/>
+          </a:bodyPr>
+          <a:lstStyle/>
+          <a:p>
+            <a:pPr algn="l">
+              <a:lnSpc>
+                <a:spcPct val="110000"/>
+              </a:lnSpc>
+              <a:spcAft>
+                <a:spcPts val="600"/>
+              </a:spcAft>
+            </a:pPr>
+            <a:r>
+              <a:rPr sz="2400" b="1">
+                <a:solidFill>
+                  <a:srgbClr val="FFFFFF"/>
+                </a:solidFill>
+                <a:latin typeface="微软雅黑"/>
+              </a:rPr>
+              <a:t>实跑截图证据 · m51_multiagent</a:t>
+            </a:r>
+          </a:p>
+        </p:txBody>
+      </p:sp>
+      <p:sp>
+        <p:nvSpPr>
+          <p:cNvPr id="11" name="Rectangle 10"/>
+          <p:cNvSpPr/>
+          <p:nvPr/>
+        </p:nvSpPr>
+        <p:spPr>
+          <a:xfrm>
+            <a:off x="500000" y="6500000"/>
+            <a:ext cx="11100000" cy="20000"/>
+          </a:xfrm>
+          <a:prstGeom prst="rect">
+            <a:avLst/>
+          </a:prstGeom>
+          <a:solidFill>
+            <a:srgbClr val="C9D4EE"/>
+          </a:solidFill>
+          <a:ln>
+            <a:noFill/>
+          </a:ln>
+          <a:effectLst/>
+        </p:spPr>
+        <p:style>
+          <a:lnRef idx="1">
+            <a:schemeClr val="accent1"/>
+          </a:lnRef>
+          <a:fillRef idx="3">
+            <a:schemeClr val="accent1"/>
+          </a:fillRef>
+          <a:effectRef idx="2">
+            <a:schemeClr val="accent1"/>
+          </a:effectRef>
+          <a:fontRef idx="minor">
+            <a:schemeClr val="lt1"/>
+          </a:fontRef>
+        </p:style>
+        <p:txBody>
+          <a:bodyPr rtlCol="0" anchor="ctr"/>
+          <a:lstStyle/>
+          <a:p>
+            <a:pPr algn="ctr"/>
+          </a:p>
+        </p:txBody>
+      </p:sp>
+      <p:sp>
+        <p:nvSpPr>
+          <p:cNvPr id="12" name="TextBox 11"/>
+          <p:cNvSpPr txBox="1"/>
+          <p:nvPr/>
+        </p:nvSpPr>
+        <p:spPr>
+          <a:xfrm>
+            <a:off x="500000" y="6540000"/>
+            <a:ext cx="7000000" cy="300000"/>
+          </a:xfrm>
+          <a:prstGeom prst="rect">
+            <a:avLst/>
+          </a:prstGeom>
+          <a:noFill/>
+        </p:spPr>
+        <p:txBody>
+          <a:bodyPr wrap="square" anchor="t">
+            <a:spAutoFit/>
+          </a:bodyPr>
+          <a:lstStyle/>
+          <a:p>
+            <a:pPr algn="l">
+              <a:lnSpc>
+                <a:spcPct val="110000"/>
+              </a:lnSpc>
+              <a:spcAft>
+                <a:spcPts val="600"/>
+              </a:spcAft>
+            </a:pPr>
+            <a:r>
+              <a:rPr sz="1000" b="0">
+                <a:solidFill>
+                  <a:srgbClr val="8A97B5"/>
+                </a:solidFill>
+                <a:latin typeface="微软雅黑"/>
+              </a:rPr>
+              <a:t>两江智造集团 · AI应用基础48课时版</a:t>
+            </a:r>
+          </a:p>
+        </p:txBody>
+      </p:sp>
+      <p:sp>
+        <p:nvSpPr>
+          <p:cNvPr id="13" name="TextBox 12"/>
+          <p:cNvSpPr txBox="1"/>
+          <p:nvPr/>
+        </p:nvSpPr>
+        <p:spPr>
+          <a:xfrm>
+            <a:off x="10600000" y="6540000"/>
+            <a:ext cx="1000000" cy="300000"/>
+          </a:xfrm>
+          <a:prstGeom prst="rect">
+            <a:avLst/>
+          </a:prstGeom>
+          <a:noFill/>
+        </p:spPr>
+        <p:txBody>
+          <a:bodyPr wrap="square" anchor="t">
+            <a:spAutoFit/>
+          </a:bodyPr>
+          <a:lstStyle/>
+          <a:p>
+            <a:pPr algn="r">
+              <a:lnSpc>
+                <a:spcPct val="110000"/>
+              </a:lnSpc>
+              <a:spcAft>
+                <a:spcPts val="600"/>
+              </a:spcAft>
+            </a:pPr>
+            <a:r>
+              <a:rPr sz="1000" b="0">
+                <a:solidFill>
+                  <a:srgbClr val="8A97B5"/>
+                </a:solidFill>
+                <a:latin typeface="微软雅黑"/>
+              </a:rPr>
+              <a:t>9 / 12</a:t>
+            </a:r>
+          </a:p>
+        </p:txBody>
+      </p:sp>
+      <p:sp>
+        <p:nvSpPr>
+          <p:cNvPr id="14" name="Rectangle 13"/>
+          <p:cNvSpPr/>
+          <p:nvPr/>
+        </p:nvSpPr>
+        <p:spPr>
+          <a:xfrm>
+            <a:off x="457200" y="1481328"/>
+            <a:ext cx="5486400" cy="2304288"/>
+          </a:xfrm>
+          <a:prstGeom prst="rect">
+            <a:avLst/>
+          </a:prstGeom>
+          <a:solidFill>
+            <a:srgbClr val="FFFFFF"/>
+          </a:solidFill>
+          <a:ln>
+            <a:solidFill>
+              <a:srgbClr val="D6DCE4"/>
+            </a:solidFill>
+          </a:ln>
+          <a:effectLst/>
+        </p:spPr>
+        <p:style>
+          <a:lnRef idx="1">
+            <a:schemeClr val="accent1"/>
+          </a:lnRef>
+          <a:fillRef idx="3">
+            <a:schemeClr val="accent1"/>
+          </a:fillRef>
+          <a:effectRef idx="2">
+            <a:schemeClr val="accent1"/>
+          </a:effectRef>
+          <a:fontRef idx="minor">
+            <a:schemeClr val="lt1"/>
+          </a:fontRef>
+        </p:style>
+        <p:txBody>
+          <a:bodyPr rtlCol="0" anchor="ctr" wrap="square"/>
+          <a:lstStyle/>
+          <a:p>
+            <a:pPr algn="ctr"/>
+          </a:p>
+        </p:txBody>
+      </p:sp>
+      <p:sp>
+        <p:nvSpPr>
+          <p:cNvPr id="15" name="TextBox 14"/>
+          <p:cNvSpPr txBox="1"/>
+          <p:nvPr/>
+        </p:nvSpPr>
+        <p:spPr>
+          <a:xfrm>
+            <a:off x="530352" y="1517904"/>
+            <a:ext cx="5340096" cy="237744"/>
+          </a:xfrm>
+          <a:prstGeom prst="rect">
+            <a:avLst/>
+          </a:prstGeom>
+          <a:noFill/>
+        </p:spPr>
+        <p:txBody>
+          <a:bodyPr wrap="square">
+            <a:spAutoFit/>
+          </a:bodyPr>
+          <a:lstStyle/>
+          <a:p>
+            <a:r>
+              <a:rPr sz="950" b="1">
+                <a:solidFill>
+                  <a:srgbClr val="010328"/>
+                </a:solidFill>
+                <a:latin typeface="微软雅黑"/>
+              </a:rPr>
+              <a:t>① run.py 实跑终端输出（逐字捕获）</a:t>
+            </a:r>
+          </a:p>
+        </p:txBody>
+      </p:sp>
+      <p:pic>
+        <p:nvPicPr>
+          <p:cNvPr id="16" name="Picture 15" descr="shot_run.png"/>
+          <p:cNvPicPr>
+            <a:picLocks noChangeAspect="1"/>
+          </p:cNvPicPr>
+          <p:nvPr/>
+        </p:nvPicPr>
+        <p:blipFill>
+          <a:blip r:embed="rId2"/>
+          <a:stretch>
+            <a:fillRect/>
+          </a:stretch>
+        </p:blipFill>
+        <p:spPr>
+          <a:xfrm>
+            <a:off x="964038" y="1773936"/>
+            <a:ext cx="4472722" cy="1956816"/>
+          </a:xfrm>
+          <a:prstGeom prst="rect">
+            <a:avLst/>
+          </a:prstGeom>
+        </p:spPr>
+      </p:pic>
+      <p:sp>
+        <p:nvSpPr>
+          <p:cNvPr id="17" name="Rectangle 16"/>
+          <p:cNvSpPr/>
+          <p:nvPr/>
+        </p:nvSpPr>
+        <p:spPr>
+          <a:xfrm>
+            <a:off x="6327648" y="1481328"/>
+            <a:ext cx="5486400" cy="2304288"/>
+          </a:xfrm>
+          <a:prstGeom prst="rect">
+            <a:avLst/>
+          </a:prstGeom>
+          <a:solidFill>
+            <a:srgbClr val="FFFFFF"/>
+          </a:solidFill>
+          <a:ln>
+            <a:solidFill>
+              <a:srgbClr val="D6DCE4"/>
+            </a:solidFill>
+          </a:ln>
+          <a:effectLst/>
+        </p:spPr>
+        <p:style>
+          <a:lnRef idx="1">
+            <a:schemeClr val="accent1"/>
+          </a:lnRef>
+          <a:fillRef idx="3">
+            <a:schemeClr val="accent1"/>
+          </a:fillRef>
+          <a:effectRef idx="2">
+            <a:schemeClr val="accent1"/>
+          </a:effectRef>
+          <a:fontRef idx="minor">
+            <a:schemeClr val="lt1"/>
+          </a:fontRef>
+        </p:style>
+        <p:txBody>
+          <a:bodyPr rtlCol="0" anchor="ctr" wrap="square"/>
+          <a:lstStyle/>
+          <a:p>
+            <a:pPr algn="ctr"/>
+          </a:p>
+        </p:txBody>
+      </p:sp>
+      <p:sp>
+        <p:nvSpPr>
+          <p:cNvPr id="18" name="TextBox 17"/>
+          <p:cNvSpPr txBox="1"/>
+          <p:nvPr/>
+        </p:nvSpPr>
+        <p:spPr>
+          <a:xfrm>
+            <a:off x="6400800" y="1517904"/>
+            <a:ext cx="5340096" cy="237744"/>
+          </a:xfrm>
+          <a:prstGeom prst="rect">
+            <a:avLst/>
+          </a:prstGeom>
+          <a:noFill/>
+        </p:spPr>
+        <p:txBody>
+          <a:bodyPr wrap="square">
+            <a:spAutoFit/>
+          </a:bodyPr>
+          <a:lstStyle/>
+          <a:p>
+            <a:r>
+              <a:rPr sz="950" b="1">
+                <a:solidFill>
+                  <a:srgbClr val="010328"/>
+                </a:solidFill>
+                <a:latin typeface="微软雅黑"/>
+              </a:rPr>
+              <a:t>② pytest 全绿终端输出（逐字捕获）</a:t>
+            </a:r>
+          </a:p>
+        </p:txBody>
+      </p:sp>
+      <p:pic>
+        <p:nvPicPr>
+          <p:cNvPr id="19" name="Picture 18" descr="shot_test.png"/>
+          <p:cNvPicPr>
+            <a:picLocks noChangeAspect="1"/>
+          </p:cNvPicPr>
+          <p:nvPr/>
+        </p:nvPicPr>
+        <p:blipFill>
+          <a:blip r:embed="rId3"/>
+          <a:stretch>
+            <a:fillRect/>
+          </a:stretch>
+        </p:blipFill>
+        <p:spPr>
+          <a:xfrm>
+            <a:off x="6834486" y="1773936"/>
+            <a:ext cx="4472722" cy="1956816"/>
+          </a:xfrm>
+          <a:prstGeom prst="rect">
+            <a:avLst/>
+          </a:prstGeom>
+        </p:spPr>
+      </p:pic>
+      <p:sp>
+        <p:nvSpPr>
+          <p:cNvPr id="20" name="Rectangle 19"/>
+          <p:cNvSpPr/>
+          <p:nvPr/>
+        </p:nvSpPr>
+        <p:spPr>
+          <a:xfrm>
+            <a:off x="457200" y="3877056"/>
+            <a:ext cx="5486400" cy="2304288"/>
+          </a:xfrm>
+          <a:prstGeom prst="rect">
+            <a:avLst/>
+          </a:prstGeom>
+          <a:solidFill>
+            <a:srgbClr val="FFFFFF"/>
+          </a:solidFill>
+          <a:ln>
+            <a:solidFill>
+              <a:srgbClr val="D6DCE4"/>
+            </a:solidFill>
+          </a:ln>
+          <a:effectLst/>
+        </p:spPr>
+        <p:style>
+          <a:lnRef idx="1">
+            <a:schemeClr val="accent1"/>
+          </a:lnRef>
+          <a:fillRef idx="3">
+            <a:schemeClr val="accent1"/>
+          </a:fillRef>
+          <a:effectRef idx="2">
+            <a:schemeClr val="accent1"/>
+          </a:effectRef>
+          <a:fontRef idx="minor">
+            <a:schemeClr val="lt1"/>
+          </a:fontRef>
+        </p:style>
+        <p:txBody>
+          <a:bodyPr rtlCol="0" anchor="ctr" wrap="square"/>
+          <a:lstStyle/>
+          <a:p>
+            <a:pPr algn="ctr"/>
+          </a:p>
+        </p:txBody>
+      </p:sp>
+      <p:sp>
+        <p:nvSpPr>
+          <p:cNvPr id="21" name="TextBox 20"/>
+          <p:cNvSpPr txBox="1"/>
+          <p:nvPr/>
+        </p:nvSpPr>
+        <p:spPr>
+          <a:xfrm>
+            <a:off x="530352" y="3913632"/>
+            <a:ext cx="5340096" cy="237744"/>
+          </a:xfrm>
+          <a:prstGeom prst="rect">
+            <a:avLst/>
+          </a:prstGeom>
+          <a:noFill/>
+        </p:spPr>
+        <p:txBody>
+          <a:bodyPr wrap="square">
+            <a:spAutoFit/>
+          </a:bodyPr>
+          <a:lstStyle/>
+          <a:p>
+            <a:r>
+              <a:rPr sz="950" b="1">
+                <a:solidFill>
+                  <a:srgbClr val="010328"/>
+                </a:solidFill>
+                <a:latin typeface="微软雅黑"/>
+              </a:rPr>
+              <a:t>③ report.txt「验收档位判定（实测）」段</a:t>
+            </a:r>
+          </a:p>
+        </p:txBody>
+      </p:sp>
+      <p:pic>
+        <p:nvPicPr>
+          <p:cNvPr id="22" name="Picture 21" descr="shot_report.png"/>
+          <p:cNvPicPr>
+            <a:picLocks noChangeAspect="1"/>
+          </p:cNvPicPr>
+          <p:nvPr/>
+        </p:nvPicPr>
+        <p:blipFill>
+          <a:blip r:embed="rId4"/>
+          <a:stretch>
+            <a:fillRect/>
+          </a:stretch>
+        </p:blipFill>
+        <p:spPr>
+          <a:xfrm>
+            <a:off x="964038" y="4169664"/>
+            <a:ext cx="4472722" cy="1956816"/>
+          </a:xfrm>
+          <a:prstGeom prst="rect">
+            <a:avLst/>
+          </a:prstGeom>
+        </p:spPr>
+      </p:pic>
+      <p:sp>
+        <p:nvSpPr>
+          <p:cNvPr id="23" name="Rectangle 22"/>
+          <p:cNvSpPr/>
+          <p:nvPr/>
+        </p:nvSpPr>
+        <p:spPr>
+          <a:xfrm>
+            <a:off x="6327648" y="3877056"/>
+            <a:ext cx="5486400" cy="2304288"/>
+          </a:xfrm>
+          <a:prstGeom prst="rect">
+            <a:avLst/>
+          </a:prstGeom>
+          <a:solidFill>
+            <a:srgbClr val="F7F9FB"/>
+          </a:solidFill>
+          <a:ln>
+            <a:solidFill>
+              <a:srgbClr val="D6DCE4"/>
+            </a:solidFill>
+          </a:ln>
+          <a:effectLst/>
+        </p:spPr>
+        <p:style>
+          <a:lnRef idx="1">
+            <a:schemeClr val="accent1"/>
+          </a:lnRef>
+          <a:fillRef idx="3">
+            <a:schemeClr val="accent1"/>
+          </a:fillRef>
+          <a:effectRef idx="2">
+            <a:schemeClr val="accent1"/>
+          </a:effectRef>
+          <a:fontRef idx="minor">
+            <a:schemeClr val="lt1"/>
+          </a:fontRef>
+        </p:style>
+        <p:txBody>
+          <a:bodyPr rtlCol="0" anchor="ctr" wrap="square"/>
+          <a:lstStyle/>
+          <a:p>
+            <a:pPr algn="ctr"/>
+          </a:p>
+        </p:txBody>
+      </p:sp>
+      <p:sp>
+        <p:nvSpPr>
+          <p:cNvPr id="24" name="TextBox 23"/>
+          <p:cNvSpPr txBox="1"/>
+          <p:nvPr/>
+        </p:nvSpPr>
+        <p:spPr>
+          <a:xfrm>
+            <a:off x="6400800" y="3913632"/>
+            <a:ext cx="5340096" cy="237744"/>
+          </a:xfrm>
+          <a:prstGeom prst="rect">
+            <a:avLst/>
+          </a:prstGeom>
+          <a:noFill/>
+        </p:spPr>
+        <p:txBody>
+          <a:bodyPr wrap="square">
+            <a:spAutoFit/>
+          </a:bodyPr>
+          <a:lstStyle/>
+          <a:p>
+            <a:r>
+              <a:rPr sz="950" b="1">
+                <a:solidFill>
+                  <a:srgbClr val="010328"/>
+                </a:solidFill>
+                <a:latin typeface="微软雅黑"/>
+              </a:rPr>
+              <a:t>④ 采集口径（可复现）</a:t>
+            </a:r>
+          </a:p>
+        </p:txBody>
+      </p:sp>
+      <p:sp>
+        <p:nvSpPr>
+          <p:cNvPr id="25" name="TextBox 24"/>
+          <p:cNvSpPr txBox="1"/>
+          <p:nvPr/>
+        </p:nvSpPr>
+        <p:spPr>
+          <a:xfrm>
+            <a:off x="6437376" y="4187952"/>
+            <a:ext cx="5266944" cy="1920240"/>
+          </a:xfrm>
+          <a:prstGeom prst="rect">
+            <a:avLst/>
+          </a:prstGeom>
+          <a:noFill/>
+        </p:spPr>
+        <p:txBody>
+          <a:bodyPr wrap="square">
+            <a:spAutoFit/>
+          </a:bodyPr>
+          <a:lstStyle/>
+          <a:p>
+            <a:r>
+              <a:rPr sz="950" b="0">
+                <a:solidFill>
+                  <a:srgbClr val="2B2F36"/>
+                </a:solidFill>
+                <a:latin typeface="微软雅黑"/>
+              </a:rPr>
+              <a:t>项目：05-AI应用基础48课时版/工程化项目/m51_multiagent/</a:t>
+            </a:r>
+          </a:p>
+          <a:p>
+            <a:r>
+              <a:rPr sz="950" b="0">
+                <a:solidFill>
+                  <a:srgbClr val="2B2F36"/>
+                </a:solidFill>
+                <a:latin typeface="微软雅黑"/>
+              </a:rPr>
+              <a:t>命令：/opt/anaconda3/bin/python run.py ｜ /opt/anaconda3/bin/python -m pytest -q</a:t>
+            </a:r>
+          </a:p>
+          <a:p>
+            <a:r>
+              <a:rPr sz="950" b="0">
+                <a:solidFill>
+                  <a:srgbClr val="2B2F36"/>
+                </a:solidFill>
+                <a:latin typeface="微软雅黑"/>
+              </a:rPr>
+              <a:t>采集：工具/ppt97/capture97.py（2026-10-28 10:49 真跑逐字捕获输出）</a:t>
+            </a:r>
+          </a:p>
+          <a:p>
+            <a:r>
+              <a:rPr sz="950" b="0">
+                <a:solidFill>
+                  <a:srgbClr val="2B2F36"/>
+                </a:solidFill>
+                <a:latin typeface="微软雅黑"/>
+              </a:rPr>
+              <a:t>渲染：工具/ppt97/terminal_png.py（终端截图，不改写任何数字）</a:t>
+            </a:r>
+          </a:p>
+          <a:p>
+            <a:r>
+              <a:rPr sz="950" b="0">
+                <a:solidFill>
+                  <a:srgbClr val="2B2F36"/>
+                </a:solidFill>
+                <a:latin typeface="微软雅黑"/>
+              </a:rPr>
+              <a:t>退出码：run=0 ｜ pytest=0</a:t>
+            </a:r>
+          </a:p>
+          <a:p>
+            <a:r>
+              <a:rPr sz="950" b="0">
+                <a:solidFill>
+                  <a:srgbClr val="2B2F36"/>
+                </a:solidFill>
+                <a:latin typeface="微软雅黑"/>
+              </a:rPr>
+              <a:t>档位判定取自 output/report.txt「验收档位判定（实测）」段</a:t>
+            </a:r>
+          </a:p>
+        </p:txBody>
+      </p:sp>
+      <p:sp>
+        <p:nvSpPr>
+          <p:cNvPr id="26" name="TextBox 25"/>
+          <p:cNvSpPr txBox="1"/>
+          <p:nvPr/>
+        </p:nvSpPr>
+        <p:spPr>
+          <a:xfrm>
+            <a:off x="457200" y="6254496"/>
+            <a:ext cx="11247120" cy="201168"/>
+          </a:xfrm>
+          <a:prstGeom prst="rect">
+            <a:avLst/>
+          </a:prstGeom>
+          <a:noFill/>
+        </p:spPr>
+        <p:txBody>
+          <a:bodyPr wrap="square">
+            <a:spAutoFit/>
+          </a:bodyPr>
+          <a:lstStyle/>
+          <a:p>
+            <a:r>
+              <a:rPr sz="900" b="0">
+                <a:solidFill>
+                  <a:srgbClr val="7A8698"/>
+                </a:solidFill>
+                <a:latin typeface="微软雅黑"/>
+              </a:rPr>
+              <a:t>截图内容逐字取自 工具/ppt97/evidence/m51_multiagent/（capture97.py 真跑捕获，未改写数字）</a:t>
+            </a:r>
+          </a:p>
+        </p:txBody>
+      </p:sp>
+    </p:spTree>
+  </p:cSld>
+  <p:clrMapOvr>
+    <a:masterClrMapping/>
+  </p:clrMapOvr>
+</p:sld>
+</file>
+
 <file path=ppt/slides/slide2.xml><?xml version="1.0" encoding="utf-8"?>
 <p:sld xmlns:a="http://schemas.openxmlformats.org/drawingml/2006/main" xmlns:p="http://schemas.openxmlformats.org/presentationml/2006/main" xmlns:r="http://schemas.openxmlformats.org/officeDocument/2006/relationships">
   <p:cSld>
@@ -5143,7 +7281,7 @@
                 </a:solidFill>
                 <a:latin typeface="微软雅黑"/>
               </a:rPr>
-              <a:t>2 / 10</a:t>
+              <a:t>2 / 12</a:t>
             </a:r>
           </a:p>
         </p:txBody>
@@ -5617,7 +7755,7 @@
                 </a:solidFill>
                 <a:latin typeface="微软雅黑"/>
               </a:rPr>
-              <a:t>3 / 10</a:t>
+              <a:t>3 / 12</a:t>
             </a:r>
           </a:p>
         </p:txBody>
@@ -6409,7 +8547,7 @@
                 </a:solidFill>
                 <a:latin typeface="微软雅黑"/>
               </a:rPr>
-              <a:t>4 / 10</a:t>
+              <a:t>4 / 12</a:t>
             </a:r>
           </a:p>
         </p:txBody>
@@ -7080,7 +9218,7 @@
                 </a:solidFill>
                 <a:latin typeface="微软雅黑"/>
               </a:rPr>
-              <a:t>5 / 10</a:t>
+              <a:t>5 / 12</a:t>
             </a:r>
           </a:p>
         </p:txBody>
@@ -7356,7 +9494,7 @@
                 </a:solidFill>
                 <a:latin typeface="微软雅黑"/>
               </a:rPr>
-              <a:t>6 / 10</a:t>
+              <a:t>6 / 12</a:t>
             </a:r>
           </a:p>
         </p:txBody>
@@ -7528,142 +9666,87 @@
                   <a:srgbClr val="0545E8"/>
                 </a:solidFill>
               </a:rPr>
-              <a:t>① 参考实现真实运行输出（本工单完成态）</a:t>
-            </a:r>
-          </a:p>
-          <a:p>
-            <a:pPr algn="l">
-              <a:spcBef>
-                <a:spcPts val="100"/>
-              </a:spcBef>
-            </a:pPr>
-            <a:r>
-              <a:rPr sz="1000" b="0">
-                <a:solidFill>
-                  <a:srgbClr val="010328"/>
-                </a:solidFill>
-              </a:rPr>
-              <a:t>=== 工单 M5-1 多智能体检修调度 · 完成态 ===</a:t>
-            </a:r>
-          </a:p>
-          <a:p>
-            <a:pPr algn="l">
-              <a:spcBef>
-                <a:spcPts val="100"/>
-              </a:spcBef>
-            </a:pPr>
-            <a:r>
-              <a:rPr sz="1000" b="0">
-                <a:solidFill>
-                  <a:srgbClr val="010328"/>
-                </a:solidFill>
-              </a:rPr>
-              <a:t>环境: 两江智造运维中心 3 台泵站 · 每步派 1 人检修或等待 · 停机计罚(-1/台) / 空转重罚(-5)</a:t>
-            </a:r>
-          </a:p>
-          <a:p>
-            <a:pPr algn="l">
-              <a:spcBef>
-                <a:spcPts val="100"/>
-              </a:spcBef>
-            </a:pPr>
-            <a:r>
-              <a:rPr sz="1000" b="0">
-                <a:solidFill>
-                  <a:srgbClr val="010328"/>
-                </a:solidFill>
-              </a:rPr>
-              <a:t>三策略对照（同一随机种子 42 · 200 步）:</a:t>
-            </a:r>
-          </a:p>
-          <a:p>
-            <a:pPr algn="l">
-              <a:spcBef>
-                <a:spcPts val="100"/>
-              </a:spcBef>
-            </a:pPr>
-            <a:r>
-              <a:rPr sz="1000" b="0">
-                <a:solidFill>
-                  <a:srgbClr val="010328"/>
-                </a:solidFill>
-              </a:rPr>
-              <a:t>  策略                           总奖励       协调正确率      停机步数</a:t>
-            </a:r>
-          </a:p>
-          <a:p>
-            <a:pPr algn="l">
-              <a:spcBef>
-                <a:spcPts val="100"/>
-              </a:spcBef>
-            </a:pPr>
-            <a:r>
-              <a:rPr sz="1000" b="0">
-                <a:solidFill>
-                  <a:srgbClr val="010328"/>
-                </a:solidFill>
-              </a:rPr>
-              <a:t>  解A 随机                     -404.0      20.9%       144</a:t>
-            </a:r>
-          </a:p>
-          <a:p>
-            <a:pPr algn="l">
-              <a:spcBef>
-                <a:spcPts val="100"/>
-              </a:spcBef>
-            </a:pPr>
-            <a:r>
-              <a:rPr sz="1000" b="0">
-                <a:solidFill>
-                  <a:srgbClr val="010328"/>
-                </a:solidFill>
-              </a:rPr>
-              <a:t>  解B 奖励导向(含预检)               -91.0      19.6%        43</a:t>
-            </a:r>
-          </a:p>
-          <a:p>
-            <a:pPr algn="l">
-              <a:spcBef>
-                <a:spcPts val="100"/>
-              </a:spcBef>
-            </a:pPr>
-            <a:r>
-              <a:rPr sz="1000" b="0">
-                <a:solidFill>
-                  <a:srgbClr val="010328"/>
-                </a:solidFill>
-              </a:rPr>
-              <a:t>  解C 安全优先(仅告警)              -788.0     100.0%        76</a:t>
-            </a:r>
-          </a:p>
-          <a:p>
-            <a:pPr algn="l">
-              <a:spcBef>
-                <a:spcPts val="100"/>
-              </a:spcBef>
-            </a:pPr>
-            <a:r>
-              <a:rPr sz="1000" b="0">
-                <a:solidFill>
-                  <a:srgbClr val="010328"/>
-                </a:solidFill>
-              </a:rPr>
-              <a:t>结论（本课最重要的工程判断）:</a:t>
-            </a:r>
-          </a:p>
-          <a:p>
-            <a:pPr algn="l">
-              <a:spcBef>
-                <a:spcPts val="100"/>
-              </a:spcBef>
-            </a:pPr>
-            <a:r>
-              <a:rPr sz="1000" b="0">
-                <a:solidFill>
-                  <a:srgbClr val="010328"/>
-                </a:solidFill>
-              </a:rPr>
-              <a:t>进阶(优秀): 在'安全优先'上叠加感知层——预测下一告警泵并提前派检，可同时抬高正确率与奖励。</a:t>
+              <a:t>① 本次真跑实测输出（逐字取自 output/report.txt）</a:t>
+            </a:r>
+          </a:p>
+          <a:p>
+            <a:r>
+              <a:rPr sz="1400" b="1">
+                <a:solidFill>
+                  <a:srgbClr val="0545E8"/>
+                </a:solidFill>
+              </a:rPr>
+              <a:t>实测达成档位: 优(A) ｜ 同种子二次运行逐键相等=是 ｜ 手写基线最高正确率 100.0% ｜ 说明书实测 620 字 ｜ 漏洞修复成对证据：修复前假派检 162 次且修复后总奖励 Δ-1134.0（套利被剥掉）｜ 未见种子泛化实测正确率 100.0%（10 集）｜ 决策记录完整=是 ｜ 代码规范率实测 95.3%</a:t>
+            </a:r>
+          </a:p>
+          <a:p>
+            <a:r>
+              <a:rPr sz="1400" b="1">
+                <a:solidFill>
+                  <a:srgbClr val="0545E8"/>
+                </a:solidFill>
+              </a:rPr>
+              <a:t>及格(D)    规范率门槛≥70% [达标] ｜ 功能OK ｜ 基线数据可复现；代码规范率≥70%</a:t>
+            </a:r>
+          </a:p>
+          <a:p>
+            <a:r>
+              <a:rPr sz="1400" b="1">
+                <a:solidFill>
+                  <a:srgbClr val="0545E8"/>
+                </a:solidFill>
+              </a:rPr>
+              <a:t>良好(C)    功能OK ｜ 正确率≥75%加说明书</a:t>
+            </a:r>
+          </a:p>
+          <a:p>
+            <a:r>
+              <a:rPr sz="1400" b="1">
+                <a:solidFill>
+                  <a:srgbClr val="0545E8"/>
+                </a:solidFill>
+              </a:rPr>
+              <a:t>优秀(B)    功能OK ｜ 修复1个漏洞有证据；决策记录完整</a:t>
+            </a:r>
+          </a:p>
+          <a:p>
+            <a:r>
+              <a:rPr sz="1400" b="1">
+                <a:solidFill>
+                  <a:srgbClr val="0545E8"/>
+                </a:solidFill>
+              </a:rPr>
+              <a:t>优(A)     功能OK ｜ 正确率≥90%或泛化实验</a:t>
+            </a:r>
+          </a:p>
+          <a:p>
+            <a:r>
+              <a:rPr sz="1400" b="1">
+                <a:solidFill>
+                  <a:srgbClr val="0545E8"/>
+                </a:solidFill>
+              </a:rPr>
+              <a:t>人工答辩项 1 条，教师答辩时确认：企业元验收栏：功能可用□ 参数留痕□ 数据可信□（师傅签字）</a:t>
+            </a:r>
+          </a:p>
+          <a:p>
+            <a:r>
+              <a:rPr sz="1400" b="1">
+                <a:solidFill>
+                  <a:srgbClr val="0545E8"/>
+                </a:solidFill>
+              </a:rPr>
+              <a:t>正确解法是约束优化：把正确率≥75% 设为硬约束，在此约束下再优化奖励</a:t>
+            </a:r>
+          </a:p>
+          <a:p>
+            <a:r>
+              <a:rPr sz="1400" b="1">
+                <a:solidFill>
+                  <a:srgbClr val="0545E8"/>
+                </a:solidFill>
+              </a:rPr>
+              <a:t>bandit 实测补全'学习型'一环：同一堵漏后的奖励下，不写规则也能学到高正确率策略——奖励设计即治理（工单B02），规则与学习互为对照组</a:t>
             </a:r>
           </a:p>
         </p:txBody>
@@ -8037,7 +10120,7 @@
                 </a:solidFill>
                 <a:latin typeface="微软雅黑"/>
               </a:rPr>
-              <a:t>7 / 10</a:t>
+              <a:t>7 / 12</a:t>
             </a:r>
           </a:p>
         </p:txBody>
@@ -8652,7 +10735,7 @@
                 </a:solidFill>
                 <a:latin typeface="微软雅黑"/>
               </a:rPr>
-              <a:t>8 / 10</a:t>
+              <a:t>10 / 12</a:t>
             </a:r>
           </a:p>
         </p:txBody>
@@ -9417,7 +11500,7 @@
                 </a:solidFill>
                 <a:latin typeface="微软雅黑"/>
               </a:rPr>
-              <a:t>9 / 10</a:t>
+              <a:t>11 / 12</a:t>
             </a:r>
           </a:p>
         </p:txBody>
